--- a/Cours_Spring_Boot.pptx
+++ b/Cours_Spring_Boot.pptx
@@ -5,7 +5,7 @@
     <p:sldMasterId id="2147483648" r:id="rId1"/>
   </p:sldMasterIdLst>
   <p:notesMasterIdLst>
-    <p:notesMasterId r:id="rId52"/>
+    <p:notesMasterId r:id="rId53"/>
   </p:notesMasterIdLst>
   <p:sldIdLst>
     <p:sldId id="290" r:id="rId2"/>
@@ -58,6 +58,7 @@
     <p:sldId id="259" r:id="rId49"/>
     <p:sldId id="333" r:id="rId50"/>
     <p:sldId id="334" r:id="rId51"/>
+    <p:sldId id="335" r:id="rId52"/>
   </p:sldIdLst>
   <p:sldSz cx="12192000" cy="6858000"/>
   <p:notesSz cx="6858000" cy="9144000"/>
@@ -257,7 +258,7 @@
           <a:p>
             <a:fld id="{D720DDB9-2FF3-4524-881B-0343EB6B0466}" type="datetimeFigureOut">
               <a:rPr lang="fr-FR" smtClean="0"/>
-              <a:t>15/09/2026</a:t>
+              <a:t>28/09/2026</a:t>
             </a:fld>
             <a:endParaRPr lang="fr-FR"/>
           </a:p>
@@ -703,7 +704,7 @@
           <a:p>
             <a:fld id="{2965CE2A-03C8-4364-BC55-7F57E3C4757F}" type="datetime1">
               <a:rPr lang="en-US" smtClean="0"/>
-              <a:t>9/15/2026</a:t>
+              <a:t>9/28/2026</a:t>
             </a:fld>
             <a:endParaRPr lang="en-US"/>
           </a:p>
@@ -871,7 +872,7 @@
           <a:p>
             <a:fld id="{A83351AD-4D63-4335-A5E1-E11A36ABCE9E}" type="datetime1">
               <a:rPr lang="en-US" smtClean="0"/>
-              <a:t>9/15/2026</a:t>
+              <a:t>9/28/2026</a:t>
             </a:fld>
             <a:endParaRPr lang="en-US"/>
           </a:p>
@@ -1049,7 +1050,7 @@
           <a:p>
             <a:fld id="{5A94026B-8870-4575-8540-E518389DF285}" type="datetime1">
               <a:rPr lang="en-US" smtClean="0"/>
-              <a:t>9/15/2026</a:t>
+              <a:t>9/28/2026</a:t>
             </a:fld>
             <a:endParaRPr lang="en-US"/>
           </a:p>
@@ -1217,7 +1218,7 @@
           <a:p>
             <a:fld id="{EEF79438-3C60-412E-9E33-DE6B63950BAC}" type="datetime1">
               <a:rPr lang="en-US" smtClean="0"/>
-              <a:t>9/15/2026</a:t>
+              <a:t>9/28/2026</a:t>
             </a:fld>
             <a:endParaRPr lang="en-US"/>
           </a:p>
@@ -1462,7 +1463,7 @@
           <a:p>
             <a:fld id="{53F2E3FD-11D6-412D-B01C-7470A1E400E2}" type="datetime1">
               <a:rPr lang="en-US" smtClean="0"/>
-              <a:t>9/15/2026</a:t>
+              <a:t>9/28/2026</a:t>
             </a:fld>
             <a:endParaRPr lang="en-US"/>
           </a:p>
@@ -1747,7 +1748,7 @@
           <a:p>
             <a:fld id="{36E06E79-68BD-4E31-AD7C-E603A9ABF02C}" type="datetime1">
               <a:rPr lang="en-US" smtClean="0"/>
-              <a:t>9/15/2026</a:t>
+              <a:t>9/28/2026</a:t>
             </a:fld>
             <a:endParaRPr lang="en-US"/>
           </a:p>
@@ -2166,7 +2167,7 @@
           <a:p>
             <a:fld id="{3CBCD069-85A8-4901-A545-B0534A28E7CF}" type="datetime1">
               <a:rPr lang="en-US" smtClean="0"/>
-              <a:t>9/15/2026</a:t>
+              <a:t>9/28/2026</a:t>
             </a:fld>
             <a:endParaRPr lang="en-US"/>
           </a:p>
@@ -2283,7 +2284,7 @@
           <a:p>
             <a:fld id="{1573C8C9-371A-4929-9E38-DC831D8FAE3F}" type="datetime1">
               <a:rPr lang="en-US" smtClean="0"/>
-              <a:t>9/15/2026</a:t>
+              <a:t>9/28/2026</a:t>
             </a:fld>
             <a:endParaRPr lang="en-US"/>
           </a:p>
@@ -2378,7 +2379,7 @@
           <a:p>
             <a:fld id="{898E8348-8E7E-4F76-83C4-23716BC43D84}" type="datetime1">
               <a:rPr lang="en-US" smtClean="0"/>
-              <a:t>9/15/2026</a:t>
+              <a:t>9/28/2026</a:t>
             </a:fld>
             <a:endParaRPr lang="en-US"/>
           </a:p>
@@ -2653,7 +2654,7 @@
           <a:p>
             <a:fld id="{5A2F1E62-9A80-4556-A7C8-11C4B755C817}" type="datetime1">
               <a:rPr lang="en-US" smtClean="0"/>
-              <a:t>9/15/2026</a:t>
+              <a:t>9/28/2026</a:t>
             </a:fld>
             <a:endParaRPr lang="en-US"/>
           </a:p>
@@ -2905,7 +2906,7 @@
           <a:p>
             <a:fld id="{E482F646-E413-4A3B-9A05-ECDB39431F68}" type="datetime1">
               <a:rPr lang="en-US" smtClean="0"/>
-              <a:t>9/15/2026</a:t>
+              <a:t>9/28/2026</a:t>
             </a:fld>
             <a:endParaRPr lang="en-US"/>
           </a:p>
@@ -3116,7 +3117,7 @@
           <a:p>
             <a:fld id="{73FA2A17-9DEF-4748-8AAD-44CE0C3DE75C}" type="datetime1">
               <a:rPr lang="en-US" smtClean="0"/>
-              <a:t>9/15/2026</a:t>
+              <a:t>9/28/2026</a:t>
             </a:fld>
             <a:endParaRPr lang="en-US"/>
           </a:p>
@@ -5679,8 +5680,8 @@
         </p:blipFill>
         <p:spPr>
           <a:xfrm>
-            <a:off x="6262902" y="1738261"/>
-            <a:ext cx="5807787" cy="3731700"/>
+            <a:off x="6528583" y="1738261"/>
+            <a:ext cx="5276425" cy="3731700"/>
           </a:xfrm>
           <a:prstGeom prst="rect">
             <a:avLst/>
@@ -19466,8 +19467,8 @@
         </p:blipFill>
         <p:spPr>
           <a:xfrm>
-            <a:off x="269653" y="980406"/>
-            <a:ext cx="4871513" cy="4991872"/>
+            <a:off x="269653" y="1457031"/>
+            <a:ext cx="4871513" cy="4038622"/>
           </a:xfrm>
           <a:prstGeom prst="rect">
             <a:avLst/>
@@ -27788,26 +27789,6 @@
                 <a:latin typeface="Aptos" panose="020B0004020202020204" pitchFamily="34" charset="0"/>
                 <a:sym typeface="Wingdings" panose="05000000000000000000" pitchFamily="2" charset="2"/>
               </a:rPr>
-              <a:t> - v et </a:t>
-            </a:r>
-            <a:r>
-              <a:rPr lang="fr-FR" sz="1600" dirty="0" err="1">
-                <a:solidFill>
-                  <a:srgbClr val="1E1F22"/>
-                </a:solidFill>
-                <a:latin typeface="Aptos" panose="020B0004020202020204" pitchFamily="34" charset="0"/>
-                <a:sym typeface="Wingdings" panose="05000000000000000000" pitchFamily="2" charset="2"/>
-              </a:rPr>
-              <a:t>ng</a:t>
-            </a:r>
-            <a:r>
-              <a:rPr lang="fr-FR" sz="1600" dirty="0">
-                <a:solidFill>
-                  <a:srgbClr val="1E1F22"/>
-                </a:solidFill>
-                <a:latin typeface="Aptos" panose="020B0004020202020204" pitchFamily="34" charset="0"/>
-                <a:sym typeface="Wingdings" panose="05000000000000000000" pitchFamily="2" charset="2"/>
-              </a:rPr>
               <a:t> - v pour vérifier que cela fonctionne </a:t>
             </a:r>
             <a:endParaRPr lang="fr-FR" sz="1600" dirty="0">
@@ -27871,7 +27852,19 @@
             </a:endParaRPr>
           </a:p>
           <a:p>
-            <a:pPr algn="just"/>
+            <a:pPr marL="285750" indent="-285750" algn="just">
+              <a:buFont typeface="Arial" panose="020B0604020202020204" pitchFamily="34" charset="0"/>
+              <a:buChar char="•"/>
+            </a:pPr>
+            <a:r>
+              <a:rPr lang="fr-FR" sz="1600" dirty="0" err="1">
+                <a:solidFill>
+                  <a:srgbClr val="1E1F22"/>
+                </a:solidFill>
+                <a:latin typeface="Aptos" panose="020B0004020202020204" pitchFamily="34" charset="0"/>
+              </a:rPr>
+              <a:t>Angular</a:t>
+            </a:r>
             <a:r>
               <a:rPr lang="fr-FR" sz="1600" dirty="0">
                 <a:solidFill>
@@ -27879,7 +27872,43 @@
                 </a:solidFill>
                 <a:latin typeface="Aptos" panose="020B0004020202020204" pitchFamily="34" charset="0"/>
               </a:rPr>
-              <a:t>Pas d’installation nécessaire </a:t>
+              <a:t> cli (</a:t>
+            </a:r>
+            <a:r>
+              <a:rPr lang="fr-FR" sz="1600" dirty="0" err="1">
+                <a:solidFill>
+                  <a:srgbClr val="1E1F22"/>
+                </a:solidFill>
+                <a:latin typeface="Aptos" panose="020B0004020202020204" pitchFamily="34" charset="0"/>
+              </a:rPr>
+              <a:t>npm</a:t>
+            </a:r>
+            <a:r>
+              <a:rPr lang="fr-FR" sz="1600" dirty="0">
+                <a:solidFill>
+                  <a:srgbClr val="1E1F22"/>
+                </a:solidFill>
+                <a:latin typeface="Aptos" panose="020B0004020202020204" pitchFamily="34" charset="0"/>
+              </a:rPr>
+              <a:t> </a:t>
+            </a:r>
+            <a:r>
+              <a:rPr lang="fr-FR" sz="1600" dirty="0" err="1">
+                <a:solidFill>
+                  <a:srgbClr val="1E1F22"/>
+                </a:solidFill>
+                <a:latin typeface="Aptos" panose="020B0004020202020204" pitchFamily="34" charset="0"/>
+              </a:rPr>
+              <a:t>install</a:t>
+            </a:r>
+            <a:r>
+              <a:rPr lang="fr-FR" sz="1600" dirty="0">
+                <a:solidFill>
+                  <a:srgbClr val="1E1F22"/>
+                </a:solidFill>
+                <a:latin typeface="Aptos" panose="020B0004020202020204" pitchFamily="34" charset="0"/>
+              </a:rPr>
+              <a:t> -g @angular/cli)</a:t>
             </a:r>
           </a:p>
           <a:p>
@@ -27932,26 +27961,6 @@
                 <a:sym typeface="Wingdings" panose="05000000000000000000" pitchFamily="2" charset="2"/>
               </a:rPr>
               <a:t>npm</a:t>
-            </a:r>
-            <a:r>
-              <a:rPr lang="fr-FR" sz="1600" dirty="0">
-                <a:solidFill>
-                  <a:srgbClr val="1E1F22"/>
-                </a:solidFill>
-                <a:latin typeface="Aptos" panose="020B0004020202020204" pitchFamily="34" charset="0"/>
-                <a:sym typeface="Wingdings" panose="05000000000000000000" pitchFamily="2" charset="2"/>
-              </a:rPr>
-              <a:t> - v et </a:t>
-            </a:r>
-            <a:r>
-              <a:rPr lang="fr-FR" sz="1600" dirty="0" err="1">
-                <a:solidFill>
-                  <a:srgbClr val="1E1F22"/>
-                </a:solidFill>
-                <a:latin typeface="Aptos" panose="020B0004020202020204" pitchFamily="34" charset="0"/>
-                <a:sym typeface="Wingdings" panose="05000000000000000000" pitchFamily="2" charset="2"/>
-              </a:rPr>
-              <a:t>ng</a:t>
             </a:r>
             <a:r>
               <a:rPr lang="fr-FR" sz="1600" dirty="0">
@@ -28925,10 +28934,10 @@
       </p:grpSpPr>
       <p:sp>
         <p:nvSpPr>
-          <p:cNvPr id="3" name="Rectangle 2">
-            <a:extLst>
-              <a:ext uri="{FF2B5EF4-FFF2-40B4-BE49-F238E27FC236}">
-                <a16:creationId xmlns:a16="http://schemas.microsoft.com/office/drawing/2014/main" id="{027C695F-04EA-25A9-0F0F-42BE33B388F9}"/>
+          <p:cNvPr id="16" name="Rectangle 15">
+            <a:extLst>
+              <a:ext uri="{FF2B5EF4-FFF2-40B4-BE49-F238E27FC236}">
+                <a16:creationId xmlns:a16="http://schemas.microsoft.com/office/drawing/2014/main" id="{2220F7C8-1E9A-5DF8-6379-8632926DA8CC}"/>
               </a:ext>
             </a:extLst>
           </p:cNvPr>
@@ -28975,10 +28984,10 @@
       </p:sp>
       <p:sp>
         <p:nvSpPr>
-          <p:cNvPr id="4" name="Rectangle 3">
-            <a:extLst>
-              <a:ext uri="{FF2B5EF4-FFF2-40B4-BE49-F238E27FC236}">
-                <a16:creationId xmlns:a16="http://schemas.microsoft.com/office/drawing/2014/main" id="{760C6E01-809E-92DB-C8C0-F72E42421F84}"/>
+          <p:cNvPr id="17" name="Rectangle 16">
+            <a:extLst>
+              <a:ext uri="{FF2B5EF4-FFF2-40B4-BE49-F238E27FC236}">
+                <a16:creationId xmlns:a16="http://schemas.microsoft.com/office/drawing/2014/main" id="{36B094AE-C3EC-2611-4192-A5E39CFAF531}"/>
               </a:ext>
             </a:extLst>
           </p:cNvPr>
@@ -29025,10 +29034,10 @@
       </p:sp>
       <p:sp>
         <p:nvSpPr>
-          <p:cNvPr id="5" name="TextBox 4">
-            <a:extLst>
-              <a:ext uri="{FF2B5EF4-FFF2-40B4-BE49-F238E27FC236}">
-                <a16:creationId xmlns:a16="http://schemas.microsoft.com/office/drawing/2014/main" id="{26B3D27A-8F35-38AB-894E-0F4359FA79E2}"/>
+          <p:cNvPr id="18" name="TextBox 4">
+            <a:extLst>
+              <a:ext uri="{FF2B5EF4-FFF2-40B4-BE49-F238E27FC236}">
+                <a16:creationId xmlns:a16="http://schemas.microsoft.com/office/drawing/2014/main" id="{ADE7135B-D624-C85D-8C31-96C94D4AB031}"/>
               </a:ext>
             </a:extLst>
           </p:cNvPr>
@@ -29073,10 +29082,10 @@
       </p:sp>
       <p:sp>
         <p:nvSpPr>
-          <p:cNvPr id="8" name="TextBox 7">
-            <a:extLst>
-              <a:ext uri="{FF2B5EF4-FFF2-40B4-BE49-F238E27FC236}">
-                <a16:creationId xmlns:a16="http://schemas.microsoft.com/office/drawing/2014/main" id="{1CADF268-9BBC-1B84-0411-4F349626DAE2}"/>
+          <p:cNvPr id="19" name="TextBox 7">
+            <a:extLst>
+              <a:ext uri="{FF2B5EF4-FFF2-40B4-BE49-F238E27FC236}">
+                <a16:creationId xmlns:a16="http://schemas.microsoft.com/office/drawing/2014/main" id="{E3993ECC-F5B0-4DBA-FD59-DCA69536700A}"/>
               </a:ext>
             </a:extLst>
           </p:cNvPr>
@@ -29115,10 +29124,10 @@
       </p:sp>
       <p:sp>
         <p:nvSpPr>
-          <p:cNvPr id="9" name="Espace réservé du numéro de diapositive 8">
-            <a:extLst>
-              <a:ext uri="{FF2B5EF4-FFF2-40B4-BE49-F238E27FC236}">
-                <a16:creationId xmlns:a16="http://schemas.microsoft.com/office/drawing/2014/main" id="{4E40FA97-5205-CD27-AA87-4E6C27F53B0D}"/>
+          <p:cNvPr id="20" name="Espace réservé du numéro de diapositive 8">
+            <a:extLst>
+              <a:ext uri="{FF2B5EF4-FFF2-40B4-BE49-F238E27FC236}">
+                <a16:creationId xmlns:a16="http://schemas.microsoft.com/office/drawing/2014/main" id="{5357EEE4-F3F4-BC34-2B65-C72233B20645}"/>
               </a:ext>
             </a:extLst>
           </p:cNvPr>
@@ -29129,7 +29138,12 @@
             <p:ph type="sldNum" sz="quarter" idx="12"/>
           </p:nvPr>
         </p:nvSpPr>
-        <p:spPr/>
+        <p:spPr>
+          <a:xfrm>
+            <a:off x="6553200" y="6356350"/>
+            <a:ext cx="2133600" cy="365125"/>
+          </a:xfrm>
+        </p:spPr>
         <p:txBody>
           <a:bodyPr/>
           <a:lstStyle/>
@@ -29144,10 +29158,10 @@
       </p:sp>
       <p:sp>
         <p:nvSpPr>
-          <p:cNvPr id="2" name="ZoneTexte 1">
-            <a:extLst>
-              <a:ext uri="{FF2B5EF4-FFF2-40B4-BE49-F238E27FC236}">
-                <a16:creationId xmlns:a16="http://schemas.microsoft.com/office/drawing/2014/main" id="{CC369C26-5AF8-0AA0-1CB3-FCD9D48046E3}"/>
+          <p:cNvPr id="21" name="ZoneTexte 20">
+            <a:extLst>
+              <a:ext uri="{FF2B5EF4-FFF2-40B4-BE49-F238E27FC236}">
+                <a16:creationId xmlns:a16="http://schemas.microsoft.com/office/drawing/2014/main" id="{3EE81F49-6394-BCD8-4E66-5C72DEF7C9F2}"/>
               </a:ext>
             </a:extLst>
           </p:cNvPr>
@@ -29157,7 +29171,7 @@
         <p:spPr>
           <a:xfrm>
             <a:off x="294968" y="1248697"/>
-            <a:ext cx="9085006" cy="2862322"/>
+            <a:ext cx="9085006" cy="3970318"/>
           </a:xfrm>
           <a:prstGeom prst="rect">
             <a:avLst/>
@@ -29296,6 +29310,66 @@
             <a:endParaRPr lang="fr-FR" dirty="0">
               <a:sym typeface="Wingdings" panose="05000000000000000000" pitchFamily="2" charset="2"/>
             </a:endParaRPr>
+          </a:p>
+          <a:p>
+            <a:pPr marL="742950" lvl="1" indent="-285750">
+              <a:buFont typeface="Arial" panose="020B0604020202020204" pitchFamily="34" charset="0"/>
+              <a:buChar char="•"/>
+            </a:pPr>
+            <a:r>
+              <a:rPr lang="fr-FR" dirty="0">
+                <a:sym typeface="Wingdings" panose="05000000000000000000" pitchFamily="2" charset="2"/>
+              </a:rPr>
+              <a:t>Dans le fichier </a:t>
+            </a:r>
+            <a:r>
+              <a:rPr lang="fr-FR" dirty="0" err="1">
+                <a:sym typeface="Wingdings" panose="05000000000000000000" pitchFamily="2" charset="2"/>
+              </a:rPr>
+              <a:t>package.json</a:t>
+            </a:r>
+            <a:r>
+              <a:rPr lang="fr-FR" dirty="0">
+                <a:sym typeface="Wingdings" panose="05000000000000000000" pitchFamily="2" charset="2"/>
+              </a:rPr>
+              <a:t>  modifier la ligne « start » : « </a:t>
+            </a:r>
+            <a:r>
+              <a:rPr lang="fr-FR" dirty="0" err="1">
+                <a:sym typeface="Wingdings" panose="05000000000000000000" pitchFamily="2" charset="2"/>
+              </a:rPr>
+              <a:t>ng</a:t>
+            </a:r>
+            <a:r>
+              <a:rPr lang="fr-FR" dirty="0">
+                <a:sym typeface="Wingdings" panose="05000000000000000000" pitchFamily="2" charset="2"/>
+              </a:rPr>
+              <a:t> serve » en « start » : « </a:t>
+            </a:r>
+            <a:r>
+              <a:rPr lang="fr-FR" dirty="0" err="1">
+                <a:sym typeface="Wingdings" panose="05000000000000000000" pitchFamily="2" charset="2"/>
+              </a:rPr>
+              <a:t>ng</a:t>
+            </a:r>
+            <a:r>
+              <a:rPr lang="fr-FR" dirty="0">
+                <a:sym typeface="Wingdings" panose="05000000000000000000" pitchFamily="2" charset="2"/>
+              </a:rPr>
+              <a:t> serve --</a:t>
+            </a:r>
+            <a:r>
+              <a:rPr lang="fr-FR" dirty="0" err="1">
+                <a:sym typeface="Wingdings" panose="05000000000000000000" pitchFamily="2" charset="2"/>
+              </a:rPr>
+              <a:t>poll</a:t>
+            </a:r>
+            <a:r>
+              <a:rPr lang="fr-FR" dirty="0">
+                <a:sym typeface="Wingdings" panose="05000000000000000000" pitchFamily="2" charset="2"/>
+              </a:rPr>
+              <a:t>=2000 »</a:t>
+            </a:r>
           </a:p>
           <a:p>
             <a:pPr marL="742950" lvl="1" indent="-285750">
@@ -29360,17 +29434,53 @@
               <a:rPr lang="fr-FR" dirty="0">
                 <a:sym typeface="Wingdings" panose="05000000000000000000" pitchFamily="2" charset="2"/>
               </a:rPr>
-              <a:t>, ouvrer le projet </a:t>
+              <a:t>, ouvrer le projet  configurer un </a:t>
+            </a:r>
+            <a:r>
+              <a:rPr lang="fr-FR" dirty="0" err="1">
+                <a:sym typeface="Wingdings" panose="05000000000000000000" pitchFamily="2" charset="2"/>
+              </a:rPr>
+              <a:t>sdk</a:t>
+            </a:r>
+            <a:r>
+              <a:rPr lang="fr-FR" dirty="0">
+                <a:sym typeface="Wingdings" panose="05000000000000000000" pitchFamily="2" charset="2"/>
+              </a:rPr>
+              <a:t> si pas déjà fait</a:t>
+            </a:r>
+          </a:p>
+          <a:p>
+            <a:pPr marL="742950" lvl="1" indent="-285750">
+              <a:buFont typeface="Arial" panose="020B0604020202020204" pitchFamily="34" charset="0"/>
+              <a:buChar char="•"/>
+            </a:pPr>
+            <a:r>
+              <a:rPr lang="fr-FR" dirty="0">
+                <a:sym typeface="Wingdings" panose="05000000000000000000" pitchFamily="2" charset="2"/>
+              </a:rPr>
+              <a:t>Dans l’onglet Maven (indiquer par un M sur la droite) </a:t>
+            </a:r>
+          </a:p>
+          <a:p>
+            <a:pPr marL="742950" lvl="1" indent="-285750">
+              <a:buFont typeface="Arial" panose="020B0604020202020204" pitchFamily="34" charset="0"/>
+              <a:buChar char="•"/>
+            </a:pPr>
+            <a:r>
+              <a:rPr lang="fr-FR" dirty="0">
+                <a:sym typeface="Wingdings" panose="05000000000000000000" pitchFamily="2" charset="2"/>
+              </a:rPr>
+              <a:t>Ensuite </a:t>
             </a:r>
           </a:p>
         </p:txBody>
       </p:sp>
       <p:pic>
         <p:nvPicPr>
-          <p:cNvPr id="7" name="Image 6">
-            <a:extLst>
-              <a:ext uri="{FF2B5EF4-FFF2-40B4-BE49-F238E27FC236}">
-                <a16:creationId xmlns:a16="http://schemas.microsoft.com/office/drawing/2014/main" id="{B8E7A98C-7615-0256-0473-D4C1D9A55F41}"/>
+          <p:cNvPr id="22" name="Image 21">
+            <a:extLst>
+              <a:ext uri="{FF2B5EF4-FFF2-40B4-BE49-F238E27FC236}">
+                <a16:creationId xmlns:a16="http://schemas.microsoft.com/office/drawing/2014/main" id="{21665492-4E7D-83B7-2371-93CB4BA64A0B}"/>
               </a:ext>
             </a:extLst>
           </p:cNvPr>
@@ -29387,8 +29497,38 @@
         </p:blipFill>
         <p:spPr>
           <a:xfrm>
-            <a:off x="4938487" y="3718502"/>
-            <a:ext cx="3229426" cy="419158"/>
+            <a:off x="1999644" y="4878259"/>
+            <a:ext cx="3056309" cy="1660653"/>
+          </a:xfrm>
+          <a:prstGeom prst="rect">
+            <a:avLst/>
+          </a:prstGeom>
+        </p:spPr>
+      </p:pic>
+      <p:pic>
+        <p:nvPicPr>
+          <p:cNvPr id="3" name="Image 2">
+            <a:extLst>
+              <a:ext uri="{FF2B5EF4-FFF2-40B4-BE49-F238E27FC236}">
+                <a16:creationId xmlns:a16="http://schemas.microsoft.com/office/drawing/2014/main" id="{AA891B04-D2B2-1250-5668-9D09869A09AA}"/>
+              </a:ext>
+            </a:extLst>
+          </p:cNvPr>
+          <p:cNvPicPr>
+            <a:picLocks noChangeAspect="1"/>
+          </p:cNvPicPr>
+          <p:nvPr/>
+        </p:nvPicPr>
+        <p:blipFill>
+          <a:blip r:embed="rId5"/>
+          <a:stretch>
+            <a:fillRect/>
+          </a:stretch>
+        </p:blipFill>
+        <p:spPr>
+          <a:xfrm>
+            <a:off x="6194322" y="4610875"/>
+            <a:ext cx="2359742" cy="2082533"/>
           </a:xfrm>
           <a:prstGeom prst="rect">
             <a:avLst/>
@@ -29399,6 +29539,555 @@
     <p:extLst>
       <p:ext uri="{BB962C8B-B14F-4D97-AF65-F5344CB8AC3E}">
         <p14:creationId xmlns:p14="http://schemas.microsoft.com/office/powerpoint/2010/main" val="1890572256"/>
+      </p:ext>
+    </p:extLst>
+  </p:cSld>
+  <p:clrMapOvr>
+    <a:masterClrMapping/>
+  </p:clrMapOvr>
+</p:sld>
+</file>
+
+<file path=ppt/slides/slide51.xml><?xml version="1.0" encoding="utf-8"?>
+<p:sld xmlns:a="http://schemas.openxmlformats.org/drawingml/2006/main" xmlns:r="http://schemas.openxmlformats.org/officeDocument/2006/relationships" xmlns:p="http://schemas.openxmlformats.org/presentationml/2006/main">
+  <p:cSld>
+    <p:spTree>
+      <p:nvGrpSpPr>
+        <p:cNvPr id="1" name="">
+          <a:extLst>
+            <a:ext uri="{FF2B5EF4-FFF2-40B4-BE49-F238E27FC236}">
+              <a16:creationId xmlns:a16="http://schemas.microsoft.com/office/drawing/2014/main" id="{23EF5EFD-0AB1-5A13-EA6B-E607F20EEBB9}"/>
+            </a:ext>
+          </a:extLst>
+        </p:cNvPr>
+        <p:cNvGrpSpPr/>
+        <p:nvPr/>
+      </p:nvGrpSpPr>
+      <p:grpSpPr>
+        <a:xfrm>
+          <a:off x="0" y="0"/>
+          <a:ext cx="0" cy="0"/>
+          <a:chOff x="0" y="0"/>
+          <a:chExt cx="0" cy="0"/>
+        </a:xfrm>
+      </p:grpSpPr>
+      <p:sp>
+        <p:nvSpPr>
+          <p:cNvPr id="16" name="Rectangle 15">
+            <a:extLst>
+              <a:ext uri="{FF2B5EF4-FFF2-40B4-BE49-F238E27FC236}">
+                <a16:creationId xmlns:a16="http://schemas.microsoft.com/office/drawing/2014/main" id="{FE8623D6-DD6C-781F-B379-603C6831E397}"/>
+              </a:ext>
+            </a:extLst>
+          </p:cNvPr>
+          <p:cNvSpPr/>
+          <p:nvPr/>
+        </p:nvSpPr>
+        <p:spPr>
+          <a:xfrm>
+            <a:off x="0" y="0"/>
+            <a:ext cx="12191695" cy="685800"/>
+          </a:xfrm>
+          <a:prstGeom prst="rect">
+            <a:avLst/>
+          </a:prstGeom>
+          <a:solidFill>
+            <a:srgbClr val="0D274B"/>
+          </a:solidFill>
+          <a:ln>
+            <a:noFill/>
+          </a:ln>
+        </p:spPr>
+        <p:style>
+          <a:lnRef idx="1">
+            <a:schemeClr val="accent1"/>
+          </a:lnRef>
+          <a:fillRef idx="3">
+            <a:schemeClr val="accent1"/>
+          </a:fillRef>
+          <a:effectRef idx="2">
+            <a:schemeClr val="accent1"/>
+          </a:effectRef>
+          <a:fontRef idx="minor">
+            <a:schemeClr val="lt1"/>
+          </a:fontRef>
+        </p:style>
+        <p:txBody>
+          <a:bodyPr rtlCol="0" anchor="ctr"/>
+          <a:lstStyle/>
+          <a:p>
+            <a:pPr algn="ctr"/>
+            <a:endParaRPr/>
+          </a:p>
+        </p:txBody>
+      </p:sp>
+      <p:sp>
+        <p:nvSpPr>
+          <p:cNvPr id="17" name="Rectangle 16">
+            <a:extLst>
+              <a:ext uri="{FF2B5EF4-FFF2-40B4-BE49-F238E27FC236}">
+                <a16:creationId xmlns:a16="http://schemas.microsoft.com/office/drawing/2014/main" id="{A64CDC03-F5E6-A817-933A-C12D502AB766}"/>
+              </a:ext>
+            </a:extLst>
+          </p:cNvPr>
+          <p:cNvSpPr/>
+          <p:nvPr/>
+        </p:nvSpPr>
+        <p:spPr>
+          <a:xfrm>
+            <a:off x="0" y="685800"/>
+            <a:ext cx="12191695" cy="64008"/>
+          </a:xfrm>
+          <a:prstGeom prst="rect">
+            <a:avLst/>
+          </a:prstGeom>
+          <a:solidFill>
+            <a:srgbClr val="F07323"/>
+          </a:solidFill>
+          <a:ln>
+            <a:noFill/>
+          </a:ln>
+        </p:spPr>
+        <p:style>
+          <a:lnRef idx="1">
+            <a:schemeClr val="accent1"/>
+          </a:lnRef>
+          <a:fillRef idx="3">
+            <a:schemeClr val="accent1"/>
+          </a:fillRef>
+          <a:effectRef idx="2">
+            <a:schemeClr val="accent1"/>
+          </a:effectRef>
+          <a:fontRef idx="minor">
+            <a:schemeClr val="lt1"/>
+          </a:fontRef>
+        </p:style>
+        <p:txBody>
+          <a:bodyPr rtlCol="0" anchor="ctr"/>
+          <a:lstStyle/>
+          <a:p>
+            <a:pPr algn="ctr"/>
+            <a:endParaRPr/>
+          </a:p>
+        </p:txBody>
+      </p:sp>
+      <p:sp>
+        <p:nvSpPr>
+          <p:cNvPr id="18" name="TextBox 4">
+            <a:extLst>
+              <a:ext uri="{FF2B5EF4-FFF2-40B4-BE49-F238E27FC236}">
+                <a16:creationId xmlns:a16="http://schemas.microsoft.com/office/drawing/2014/main" id="{39243D36-4912-A31F-8B83-4214FA39C3CC}"/>
+              </a:ext>
+            </a:extLst>
+          </p:cNvPr>
+          <p:cNvSpPr txBox="1"/>
+          <p:nvPr/>
+        </p:nvSpPr>
+        <p:spPr>
+          <a:xfrm>
+            <a:off x="502920" y="118872"/>
+            <a:ext cx="2737160" cy="492443"/>
+          </a:xfrm>
+          <a:prstGeom prst="rect">
+            <a:avLst/>
+          </a:prstGeom>
+          <a:noFill/>
+        </p:spPr>
+        <p:txBody>
+          <a:bodyPr wrap="none">
+            <a:spAutoFit/>
+          </a:bodyPr>
+          <a:lstStyle/>
+          <a:p>
+            <a:pPr>
+              <a:defRPr sz="2600" b="1">
+                <a:solidFill>
+                  <a:srgbClr val="FFFFFF"/>
+                </a:solidFill>
+                <a:latin typeface="Aptos Display"/>
+              </a:defRPr>
+            </a:pPr>
+            <a:r>
+              <a:rPr lang="fr-FR" dirty="0"/>
+              <a:t>Premier </a:t>
+            </a:r>
+            <a:r>
+              <a:rPr lang="fr-FR" dirty="0" err="1"/>
+              <a:t>Liquibase</a:t>
+            </a:r>
+            <a:endParaRPr dirty="0"/>
+          </a:p>
+        </p:txBody>
+      </p:sp>
+      <p:sp>
+        <p:nvSpPr>
+          <p:cNvPr id="19" name="TextBox 7">
+            <a:extLst>
+              <a:ext uri="{FF2B5EF4-FFF2-40B4-BE49-F238E27FC236}">
+                <a16:creationId xmlns:a16="http://schemas.microsoft.com/office/drawing/2014/main" id="{1E1C8496-11B4-73E2-DDB2-37F77C200380}"/>
+              </a:ext>
+            </a:extLst>
+          </p:cNvPr>
+          <p:cNvSpPr txBox="1"/>
+          <p:nvPr/>
+        </p:nvSpPr>
+        <p:spPr>
+          <a:xfrm>
+            <a:off x="502920" y="6510528"/>
+            <a:ext cx="10972800" cy="182880"/>
+          </a:xfrm>
+          <a:prstGeom prst="rect">
+            <a:avLst/>
+          </a:prstGeom>
+          <a:noFill/>
+        </p:spPr>
+        <p:txBody>
+          <a:bodyPr wrap="none">
+            <a:spAutoFit/>
+          </a:bodyPr>
+          <a:lstStyle/>
+          <a:p>
+            <a:pPr>
+              <a:defRPr sz="900">
+                <a:solidFill>
+                  <a:srgbClr val="646E78"/>
+                </a:solidFill>
+                <a:latin typeface="Aptos"/>
+              </a:defRPr>
+            </a:pPr>
+            <a:r>
+              <a:t>Cours Spring Boot — Java 17/21 — Spring Boot 3</a:t>
+            </a:r>
+          </a:p>
+        </p:txBody>
+      </p:sp>
+      <p:sp>
+        <p:nvSpPr>
+          <p:cNvPr id="20" name="Espace réservé du numéro de diapositive 8">
+            <a:extLst>
+              <a:ext uri="{FF2B5EF4-FFF2-40B4-BE49-F238E27FC236}">
+                <a16:creationId xmlns:a16="http://schemas.microsoft.com/office/drawing/2014/main" id="{52E2D65F-8E40-2915-28FD-ED702D01A2CA}"/>
+              </a:ext>
+            </a:extLst>
+          </p:cNvPr>
+          <p:cNvSpPr>
+            <a:spLocks noGrp="1"/>
+          </p:cNvSpPr>
+          <p:nvPr>
+            <p:ph type="sldNum" sz="quarter" idx="12"/>
+          </p:nvPr>
+        </p:nvSpPr>
+        <p:spPr>
+          <a:xfrm>
+            <a:off x="6553200" y="6356350"/>
+            <a:ext cx="2133600" cy="365125"/>
+          </a:xfrm>
+        </p:spPr>
+        <p:txBody>
+          <a:bodyPr/>
+          <a:lstStyle/>
+          <a:p>
+            <a:fld id="{C1FF6DA9-008F-8B48-92A6-B652298478BF}" type="slidenum">
+              <a:rPr lang="en-US" smtClean="0"/>
+              <a:t>51</a:t>
+            </a:fld>
+            <a:endParaRPr lang="en-US"/>
+          </a:p>
+        </p:txBody>
+      </p:sp>
+      <p:sp>
+        <p:nvSpPr>
+          <p:cNvPr id="2" name="ZoneTexte 1">
+            <a:extLst>
+              <a:ext uri="{FF2B5EF4-FFF2-40B4-BE49-F238E27FC236}">
+                <a16:creationId xmlns:a16="http://schemas.microsoft.com/office/drawing/2014/main" id="{3C603872-77EE-2F6B-275B-5A5F3634B6DF}"/>
+              </a:ext>
+            </a:extLst>
+          </p:cNvPr>
+          <p:cNvSpPr txBox="1"/>
+          <p:nvPr/>
+        </p:nvSpPr>
+        <p:spPr>
+          <a:xfrm>
+            <a:off x="416689" y="1284790"/>
+            <a:ext cx="8461093" cy="5909310"/>
+          </a:xfrm>
+          <a:prstGeom prst="rect">
+            <a:avLst/>
+          </a:prstGeom>
+          <a:noFill/>
+        </p:spPr>
+        <p:txBody>
+          <a:bodyPr wrap="square" rtlCol="0">
+            <a:spAutoFit/>
+          </a:bodyPr>
+          <a:lstStyle/>
+          <a:p>
+            <a:r>
+              <a:rPr lang="fr-FR" dirty="0"/>
+              <a:t>Dans </a:t>
+            </a:r>
+            <a:r>
+              <a:rPr lang="fr-FR" dirty="0" err="1"/>
+              <a:t>resources</a:t>
+            </a:r>
+            <a:r>
+              <a:rPr lang="fr-FR" dirty="0"/>
+              <a:t>/</a:t>
+            </a:r>
+            <a:r>
+              <a:rPr lang="fr-FR" dirty="0" err="1"/>
+              <a:t>db</a:t>
+            </a:r>
+            <a:r>
+              <a:rPr lang="fr-FR" dirty="0"/>
+              <a:t> : </a:t>
+            </a:r>
+          </a:p>
+          <a:p>
+            <a:pPr marL="285750" indent="-285750">
+              <a:buFont typeface="Arial" panose="020B0604020202020204" pitchFamily="34" charset="0"/>
+              <a:buChar char="•"/>
+            </a:pPr>
+            <a:r>
+              <a:rPr lang="fr-FR" dirty="0"/>
+              <a:t>Créer un fichier changelog-</a:t>
+            </a:r>
+            <a:r>
+              <a:rPr lang="fr-FR" dirty="0" err="1"/>
+              <a:t>master.yml</a:t>
+            </a:r>
+            <a:endParaRPr lang="fr-FR" dirty="0"/>
+          </a:p>
+          <a:p>
+            <a:pPr marL="285750" indent="-285750">
+              <a:buFont typeface="Arial" panose="020B0604020202020204" pitchFamily="34" charset="0"/>
+              <a:buChar char="•"/>
+            </a:pPr>
+            <a:endParaRPr lang="fr-FR" dirty="0"/>
+          </a:p>
+          <a:p>
+            <a:pPr marL="285750" indent="-285750">
+              <a:buFont typeface="Arial" panose="020B0604020202020204" pitchFamily="34" charset="0"/>
+              <a:buChar char="•"/>
+            </a:pPr>
+            <a:endParaRPr lang="fr-FR" dirty="0"/>
+          </a:p>
+          <a:p>
+            <a:pPr marL="285750" indent="-285750">
+              <a:buFont typeface="Arial" panose="020B0604020202020204" pitchFamily="34" charset="0"/>
+              <a:buChar char="•"/>
+            </a:pPr>
+            <a:r>
+              <a:rPr lang="fr-FR" dirty="0"/>
+              <a:t>Créer un fichier 000_table_user.xml</a:t>
+            </a:r>
+          </a:p>
+          <a:p>
+            <a:pPr marL="742950" lvl="1" indent="-285750">
+              <a:buFont typeface="Arial" panose="020B0604020202020204" pitchFamily="34" charset="0"/>
+              <a:buChar char="•"/>
+            </a:pPr>
+            <a:r>
+              <a:rPr lang="fr-FR" dirty="0"/>
+              <a:t>Mettre en </a:t>
+            </a:r>
+            <a:r>
+              <a:rPr lang="fr-FR" dirty="0" err="1"/>
+              <a:t>en-tete</a:t>
+            </a:r>
+            <a:r>
+              <a:rPr lang="fr-FR" dirty="0"/>
+              <a:t> :</a:t>
+            </a:r>
+          </a:p>
+          <a:p>
+            <a:r>
+              <a:rPr lang="fr-FR" dirty="0"/>
+              <a:t>&lt;?xml version="1.0" </a:t>
+            </a:r>
+            <a:r>
+              <a:rPr lang="fr-FR" dirty="0" err="1"/>
+              <a:t>encoding</a:t>
+            </a:r>
+            <a:r>
+              <a:rPr lang="fr-FR" dirty="0"/>
+              <a:t>="UTF-8"?&gt;</a:t>
+            </a:r>
+          </a:p>
+          <a:p>
+            <a:r>
+              <a:rPr lang="fr-FR" dirty="0"/>
+              <a:t>&lt;</a:t>
+            </a:r>
+            <a:r>
+              <a:rPr lang="fr-FR" dirty="0" err="1"/>
+              <a:t>databaseChangeLog</a:t>
+            </a:r>
+            <a:endParaRPr lang="fr-FR" dirty="0"/>
+          </a:p>
+          <a:p>
+            <a:r>
+              <a:rPr lang="fr-FR" dirty="0"/>
+              <a:t>        </a:t>
+            </a:r>
+            <a:r>
+              <a:rPr lang="fr-FR" dirty="0" err="1"/>
+              <a:t>xmlns</a:t>
+            </a:r>
+            <a:r>
+              <a:rPr lang="fr-FR" dirty="0"/>
+              <a:t>="http://www.liquibase.org/xml/ns/dbchangelog"</a:t>
+            </a:r>
+          </a:p>
+          <a:p>
+            <a:r>
+              <a:rPr lang="fr-FR" dirty="0"/>
+              <a:t>        </a:t>
+            </a:r>
+            <a:r>
+              <a:rPr lang="fr-FR" dirty="0" err="1"/>
+              <a:t>xmlns:xsi</a:t>
+            </a:r>
+            <a:r>
+              <a:rPr lang="fr-FR" dirty="0"/>
+              <a:t>="http://www.w3.org/2001/XMLSchema-instance"</a:t>
+            </a:r>
+          </a:p>
+          <a:p>
+            <a:r>
+              <a:rPr lang="fr-FR" dirty="0"/>
+              <a:t>        </a:t>
+            </a:r>
+            <a:r>
+              <a:rPr lang="fr-FR" dirty="0" err="1"/>
+              <a:t>xsi:schemaLocation</a:t>
+            </a:r>
+            <a:r>
+              <a:rPr lang="fr-FR" dirty="0"/>
+              <a:t>="</a:t>
+            </a:r>
+          </a:p>
+          <a:p>
+            <a:r>
+              <a:rPr lang="fr-FR" dirty="0"/>
+              <a:t>            http://www.liquibase.org/xml/ns/dbchangelog</a:t>
+            </a:r>
+          </a:p>
+          <a:p>
+            <a:r>
+              <a:rPr lang="fr-FR" dirty="0"/>
+              <a:t>            </a:t>
+            </a:r>
+            <a:r>
+              <a:rPr lang="fr-FR" dirty="0">
+                <a:hlinkClick r:id="rId2"/>
+              </a:rPr>
+              <a:t>http://www.liquibase.org/xml/ns/dbchangelog/dbchangelog-4.21.xsd</a:t>
+            </a:r>
+            <a:r>
+              <a:rPr lang="fr-FR" dirty="0"/>
+              <a:t>"&gt;</a:t>
+            </a:r>
+          </a:p>
+          <a:p>
+            <a:endParaRPr lang="fr-FR" dirty="0"/>
+          </a:p>
+          <a:p>
+            <a:r>
+              <a:rPr lang="fr-FR" dirty="0"/>
+              <a:t>	&lt;</a:t>
+            </a:r>
+            <a:r>
+              <a:rPr lang="fr-FR" dirty="0" err="1"/>
+              <a:t>changeSet</a:t>
+            </a:r>
+            <a:r>
+              <a:rPr lang="fr-FR" dirty="0"/>
+              <a:t>&gt;</a:t>
+            </a:r>
+          </a:p>
+          <a:p>
+            <a:r>
+              <a:rPr lang="fr-FR" dirty="0"/>
+              <a:t>		…</a:t>
+            </a:r>
+          </a:p>
+          <a:p>
+            <a:r>
+              <a:rPr lang="fr-FR" dirty="0"/>
+              <a:t>	&lt;/</a:t>
+            </a:r>
+            <a:r>
+              <a:rPr lang="fr-FR" dirty="0" err="1"/>
+              <a:t>changeSet</a:t>
+            </a:r>
+            <a:r>
+              <a:rPr lang="fr-FR" dirty="0"/>
+              <a:t>&gt;</a:t>
+            </a:r>
+          </a:p>
+          <a:p>
+            <a:r>
+              <a:rPr lang="fr-FR" dirty="0"/>
+              <a:t>&lt;/</a:t>
+            </a:r>
+            <a:r>
+              <a:rPr lang="fr-FR" dirty="0" err="1"/>
+              <a:t>databaseChangeLog</a:t>
+            </a:r>
+            <a:r>
+              <a:rPr lang="fr-FR" dirty="0"/>
+              <a:t>&gt;</a:t>
+            </a:r>
+          </a:p>
+          <a:p>
+            <a:pPr lvl="2"/>
+            <a:endParaRPr lang="fr-FR" dirty="0"/>
+          </a:p>
+          <a:p>
+            <a:pPr lvl="1"/>
+            <a:br>
+              <a:rPr lang="fr-FR" dirty="0"/>
+            </a:br>
+            <a:endParaRPr lang="fr-FR" dirty="0"/>
+          </a:p>
+        </p:txBody>
+      </p:sp>
+      <p:pic>
+        <p:nvPicPr>
+          <p:cNvPr id="5" name="Image 4">
+            <a:extLst>
+              <a:ext uri="{FF2B5EF4-FFF2-40B4-BE49-F238E27FC236}">
+                <a16:creationId xmlns:a16="http://schemas.microsoft.com/office/drawing/2014/main" id="{5526A208-11DF-BE01-FF73-998BF4EF368F}"/>
+              </a:ext>
+            </a:extLst>
+          </p:cNvPr>
+          <p:cNvPicPr>
+            <a:picLocks noChangeAspect="1"/>
+          </p:cNvPicPr>
+          <p:nvPr/>
+        </p:nvPicPr>
+        <p:blipFill>
+          <a:blip r:embed="rId3"/>
+          <a:stretch>
+            <a:fillRect/>
+          </a:stretch>
+        </p:blipFill>
+        <p:spPr>
+          <a:xfrm>
+            <a:off x="5319391" y="969647"/>
+            <a:ext cx="4601217" cy="1257475"/>
+          </a:xfrm>
+          <a:prstGeom prst="rect">
+            <a:avLst/>
+          </a:prstGeom>
+        </p:spPr>
+      </p:pic>
+    </p:spTree>
+    <p:extLst>
+      <p:ext uri="{BB962C8B-B14F-4D97-AF65-F5344CB8AC3E}">
+        <p14:creationId xmlns:p14="http://schemas.microsoft.com/office/powerpoint/2010/main" val="1282260612"/>
       </p:ext>
     </p:extLst>
   </p:cSld>
